--- a/s2-charts-exploration/slides.pptx
+++ b/s2-charts-exploration/slides.pptx
@@ -522,7 +522,7 @@
           <a:lstStyle/>
           <a:p>
             <a:r>
-              <a:t>Welcome back, everybody, and welcome if this is your first one. I am George Mount from Stringfest Analytics, and this is session two of the free Python in Excel series: charts and exploration Excel cannot do alone. The kicker on the screen is the whole idea: charts Excel does not have, drawn inside a cell. Here is the promise for the next forty five minutes. You will make your first seaborn chart, learn the one workflow that gets a picture out of a cell and onto the sheet where people can see it, then make five charts Excel either does not have or makes you fight for. And in the last ten minutes we stop admiring charts and use them the way an analyst does: bin a column, group it, chart the groups, and let a chart raise a question. Excel open, mpg sheet ready. Let me share my screen.</a:t>
+              <a:t>Welcome back, everybody, and welcome if this is your first one. I am George Mount from Stringfest Analytics, and this is session two of the free Python in Excel series: charts and exploration with seaborn. The kicker on the screen is the whole idea: a chart in one line, drawn inside the grid. Here is the promise for the next forty five minutes. You will make your first seaborn chart, learn the one workflow that gets a picture out of a cell and onto the sheet where people can see it, then make five more, one line of code each. And in the last ten minutes we stop admiring charts and use them the way an analyst does: bin a column, group it, chart the groups, and let a chart raise a question. Excel open, mpg sheet ready. Let me share my screen.</a:t>
             </a:r>
           </a:p>
         </p:txBody>
@@ -942,7 +942,7 @@
           <a:lstStyle/>
           <a:p>
             <a:r>
-              <a:t>Part three is one cell, and it is my favourite. Small multiples: the same chart repeated once per group, with shared axes, so your eye compares instead of your hands rebuilding. In Excel you copy a chart, change the filter, line them up and hope the axes match. Here it is two lines. Click K120, and let's type it.</a:t>
+              <a:t>Part three is one cell, and it is my favourite. Small multiples: the same chart repeated once per group, with shared axes, so your eye compares instead of your hands rebuilding. In Excel you would copy a chart, change the filter, line them up and check the axes match. Here it is two lines. Click K120, and let's type it.</a:t>
             </a:r>
           </a:p>
         </p:txBody>
@@ -1082,7 +1082,7 @@
           <a:lstStyle/>
           <a:p>
             <a:r>
-              <a:t>The whole session on one slide. One workflow you will use for every chart from now on: Ctrl+Enter, Ctrl+Alt+Shift+M, Create Reference, drag it to size. Two knobs that did most of the work: hue, a colour per group, and col, a panel per group. Five charts Excel cannot draw on its own: a histogram with bins you control, box plots straight from a category column, a scatter coloured by group, an annotated correlation heatmap, and small multiples with FacetGrid. Seven Python cells on one dataset, and you typed every one. Chapters 3 and 4 of the book have the rest of the gallery and the exploration loop that uses it.</a:t>
+              <a:t>The whole session on one slide. One workflow you will use for every chart from now on: Ctrl+Enter, Ctrl+Alt+Shift+M, Create Reference, drag it to size. Two knobs that did most of the work: hue, a colour per group, and col, a panel per group. Five charts, one line of code each: a histogram with bins you control, box plots straight from a category column, a scatter coloured by group, an annotated correlation heatmap, and small multiples with FacetGrid. Excel can draw some of these; the point is how little code it takes here, and how easily you change them. Seven Python cells on one dataset, and you typed every one. Chapters 3 and 4 of the book have the rest of the gallery and the exploration loop that uses it.</a:t>
             </a:r>
           </a:p>
         </p:txBody>
@@ -4976,7 +4976,7 @@
                 </a:solidFill>
                 <a:latin typeface="Arial"/>
               </a:rPr>
-              <a:t>Charts Excel doesn't have, in a cell</a:t>
+              <a:t>A chart in one line, inside the grid</a:t>
             </a:r>
           </a:p>
           <a:p>
@@ -5003,7 +5003,7 @@
                 </a:solidFill>
                 <a:latin typeface="Arial Black"/>
               </a:rPr>
-              <a:t>Charts and exploration Excel can't do alone</a:t>
+              <a:t>Charts and exploration with seaborn</a:t>
             </a:r>
           </a:p>
           <a:p>
@@ -5019,7 +5019,7 @@
                 </a:solidFill>
                 <a:latin typeface="Arial"/>
               </a:rPr>
-              <a:t>Get a Python chart out of the cell, then make five more Excel can't.</a:t>
+              <a:t>Your first seaborn chart, then five more, one line of code each.</a:t>
             </a:r>
           </a:p>
         </p:txBody>
@@ -6516,7 +6516,7 @@
                 </a:solidFill>
                 <a:latin typeface="Arial"/>
               </a:rPr>
-              <a:t>Small multiples: the chart Excel users build by hand, three times</a:t>
+              <a:t>Small multiples: one panel per group, shared axes, two lines</a:t>
             </a:r>
           </a:p>
         </p:txBody>
@@ -6950,7 +6950,7 @@
                 </a:solidFill>
                 <a:latin typeface="Arial"/>
               </a:rPr>
-              <a:t>charts Excel can't draw alone</a:t>
+              <a:t>charts, one line of code each</a:t>
             </a:r>
           </a:p>
         </p:txBody>
@@ -7785,7 +7785,7 @@
                 </a:solidFill>
                 <a:latin typeface="Arial"/>
               </a:rPr>
-              <a:t>One dataset, eleven cells, six charts Excel can't draw on its own</a:t>
+              <a:t>One dataset, seven short cells, six charts</a:t>
             </a:r>
           </a:p>
         </p:txBody>
@@ -7858,7 +7858,7 @@
                 </a:solidFill>
                 <a:latin typeface="Arial"/>
               </a:rPr>
-              <a:t>Part 2: Charts Excel doesn't have (13 min, 4 short cells, we type them together)</a:t>
+              <a:t>Part 2: Five charts, one line each (13 min, 4 short cells, we type them together)</a:t>
             </a:r>
           </a:p>
           <a:p>
@@ -9869,7 +9869,7 @@
                 </a:solidFill>
                 <a:latin typeface="Arial Black"/>
               </a:rPr>
-              <a:t>Charts Excel doesn't have</a:t>
+              <a:t>Five charts, one line each</a:t>
             </a:r>
           </a:p>
           <a:p>
